--- a/public/fun/pack/pptx/wedding/결혼식_20_감사·답례중심_소나기지난뒤.pptx
+++ b/public/fun/pack/pptx/wedding/결혼식_20_감사·답례중심_소나기지난뒤.pptx
@@ -3347,7 +3347,7 @@
             <a:r>
               <a:rPr sz="3600" b="1" i="0">
                 <a:solidFill>
-                  <a:srgbClr val="23535C"/>
+                  <a:srgbClr val="11525F"/>
                 </a:solidFill>
               </a:rPr>
               <a:t>저희 결혼합니다</a:t>
@@ -3385,7 +3385,7 @@
             <a:r>
               <a:rPr sz="1700" b="0" i="1">
                 <a:solidFill>
-                  <a:srgbClr val="23535C"/>
+                  <a:srgbClr val="11525F"/>
                 </a:solidFill>
               </a:rPr>
               <a:t>작은 답례품을 하나 더 준비했습니다</a:t>
@@ -3460,7 +3460,7 @@
     <p:bg>
       <p:bgPr>
         <a:solidFill>
-          <a:srgbClr val="F0F8F9"/>
+          <a:srgbClr val="EEFAFC"/>
         </a:solidFill>
         <a:effectLst/>
       </p:bgPr>
@@ -3487,7 +3487,7 @@
             <a:avLst/>
           </a:prstGeom>
           <a:solidFill>
-            <a:srgbClr val="D1EBF0"/>
+            <a:srgbClr val="D1F3FA"/>
           </a:solidFill>
           <a:ln>
             <a:noFill/>
@@ -3516,7 +3516,7 @@
             <a:avLst/>
           </a:prstGeom>
           <a:solidFill>
-            <a:srgbClr val="3F95A6"/>
+            <a:srgbClr val="26AAC5"/>
           </a:solidFill>
           <a:ln>
             <a:noFill/>
@@ -3560,7 +3560,7 @@
             <a:r>
               <a:rPr sz="3000" b="1" i="0">
                 <a:solidFill>
-                  <a:srgbClr val="23535C"/>
+                  <a:srgbClr val="11525F"/>
                 </a:solidFill>
               </a:rPr>
               <a:t>신랑 · 신부 소개</a:t>
@@ -3583,11 +3583,11 @@
             <a:avLst/>
           </a:prstGeom>
           <a:solidFill>
-            <a:srgbClr val="D1EBF0"/>
+            <a:srgbClr val="D1F3FA"/>
           </a:solidFill>
           <a:ln w="19050">
             <a:solidFill>
-              <a:srgbClr val="3F95A6"/>
+              <a:srgbClr val="26AAC5"/>
             </a:solidFill>
             <a:prstDash val="dash"/>
           </a:ln>
@@ -3606,7 +3606,7 @@
             <a:r>
               <a:rPr sz="1200" b="0" i="0">
                 <a:solidFill>
-                  <a:srgbClr val="23535C"/>
+                  <a:srgbClr val="11525F"/>
                 </a:solidFill>
               </a:rPr>
               <a:t>사진</a:t>
@@ -3644,7 +3644,7 @@
             <a:r>
               <a:rPr sz="1600" b="1" i="0">
                 <a:solidFill>
-                  <a:srgbClr val="23535C"/>
+                  <a:srgbClr val="11525F"/>
                 </a:solidFill>
               </a:rPr>
               <a:t>신랑</a:t>
@@ -3735,11 +3735,11 @@
             <a:avLst/>
           </a:prstGeom>
           <a:solidFill>
-            <a:srgbClr val="D1EBF0"/>
+            <a:srgbClr val="D1F3FA"/>
           </a:solidFill>
           <a:ln w="19050">
             <a:solidFill>
-              <a:srgbClr val="3F95A6"/>
+              <a:srgbClr val="26AAC5"/>
             </a:solidFill>
             <a:prstDash val="dash"/>
           </a:ln>
@@ -3758,7 +3758,7 @@
             <a:r>
               <a:rPr sz="1200" b="0" i="0">
                 <a:solidFill>
-                  <a:srgbClr val="23535C"/>
+                  <a:srgbClr val="11525F"/>
                 </a:solidFill>
               </a:rPr>
               <a:t>사진</a:t>
@@ -3796,7 +3796,7 @@
             <a:r>
               <a:rPr sz="1600" b="1" i="0">
                 <a:solidFill>
-                  <a:srgbClr val="23535C"/>
+                  <a:srgbClr val="11525F"/>
                 </a:solidFill>
               </a:rPr>
               <a:t>신부</a:t>
@@ -3886,7 +3886,7 @@
     <p:bg>
       <p:bgPr>
         <a:solidFill>
-          <a:srgbClr val="F0F8F9"/>
+          <a:srgbClr val="EEFAFC"/>
         </a:solidFill>
         <a:effectLst/>
       </p:bgPr>
@@ -3913,7 +3913,7 @@
             <a:avLst/>
           </a:prstGeom>
           <a:solidFill>
-            <a:srgbClr val="D1EBF0"/>
+            <a:srgbClr val="D1F3FA"/>
           </a:solidFill>
           <a:ln>
             <a:noFill/>
@@ -3942,7 +3942,7 @@
             <a:avLst/>
           </a:prstGeom>
           <a:solidFill>
-            <a:srgbClr val="3F95A6"/>
+            <a:srgbClr val="26AAC5"/>
           </a:solidFill>
           <a:ln>
             <a:noFill/>
@@ -3986,7 +3986,7 @@
             <a:r>
               <a:rPr sz="3000" b="1" i="0">
                 <a:solidFill>
-                  <a:srgbClr val="23535C"/>
+                  <a:srgbClr val="11525F"/>
                 </a:solidFill>
               </a:rPr>
               <a:t>감사의 말씀</a:t>
@@ -4011,11 +4011,11 @@
             </a:avLst>
           </a:prstGeom>
           <a:solidFill>
-            <a:srgbClr val="F0F8F9"/>
+            <a:srgbClr val="EEFAFC"/>
           </a:solidFill>
           <a:ln w="12700">
             <a:solidFill>
-              <a:srgbClr val="D1EBF0"/>
+              <a:srgbClr val="D1F3FA"/>
             </a:solidFill>
           </a:ln>
         </p:spPr>
@@ -4154,7 +4154,7 @@
     <p:bg>
       <p:bgPr>
         <a:solidFill>
-          <a:srgbClr val="F0F8F9"/>
+          <a:srgbClr val="EEFAFC"/>
         </a:solidFill>
         <a:effectLst/>
       </p:bgPr>
@@ -4181,7 +4181,7 @@
             <a:avLst/>
           </a:prstGeom>
           <a:solidFill>
-            <a:srgbClr val="D1EBF0"/>
+            <a:srgbClr val="D1F3FA"/>
           </a:solidFill>
           <a:ln>
             <a:noFill/>
@@ -4210,7 +4210,7 @@
             <a:avLst/>
           </a:prstGeom>
           <a:solidFill>
-            <a:srgbClr val="3F95A6"/>
+            <a:srgbClr val="26AAC5"/>
           </a:solidFill>
           <a:ln>
             <a:noFill/>
@@ -4254,7 +4254,7 @@
             <a:r>
               <a:rPr sz="3000" b="1" i="0">
                 <a:solidFill>
-                  <a:srgbClr val="23535C"/>
+                  <a:srgbClr val="11525F"/>
                 </a:solidFill>
               </a:rPr>
               <a:t>답례 안내</a:t>
@@ -4279,11 +4279,11 @@
             </a:avLst>
           </a:prstGeom>
           <a:solidFill>
-            <a:srgbClr val="F0F8F9"/>
+            <a:srgbClr val="EEFAFC"/>
           </a:solidFill>
           <a:ln w="15875">
             <a:solidFill>
-              <a:srgbClr val="D1EBF0"/>
+              <a:srgbClr val="D1F3FA"/>
             </a:solidFill>
           </a:ln>
         </p:spPr>
@@ -4310,7 +4310,7 @@
             <a:avLst/>
           </a:prstGeom>
           <a:solidFill>
-            <a:srgbClr val="3F95A6"/>
+            <a:srgbClr val="26AAC5"/>
           </a:solidFill>
           <a:ln>
             <a:noFill/>
@@ -4368,7 +4368,7 @@
             <a:r>
               <a:rPr sz="1800" b="1" i="0">
                 <a:solidFill>
-                  <a:srgbClr val="23535C"/>
+                  <a:srgbClr val="11525F"/>
                 </a:solidFill>
               </a:rPr>
               <a:t>답례품</a:t>
@@ -4431,11 +4431,11 @@
             </a:avLst>
           </a:prstGeom>
           <a:solidFill>
-            <a:srgbClr val="F0F8F9"/>
+            <a:srgbClr val="EEFAFC"/>
           </a:solidFill>
           <a:ln w="15875">
             <a:solidFill>
-              <a:srgbClr val="D1EBF0"/>
+              <a:srgbClr val="D1F3FA"/>
             </a:solidFill>
           </a:ln>
         </p:spPr>
@@ -4462,7 +4462,7 @@
             <a:avLst/>
           </a:prstGeom>
           <a:solidFill>
-            <a:srgbClr val="3F95A6"/>
+            <a:srgbClr val="26AAC5"/>
           </a:solidFill>
           <a:ln>
             <a:noFill/>
@@ -4520,7 +4520,7 @@
             <a:r>
               <a:rPr sz="1800" b="1" i="0">
                 <a:solidFill>
-                  <a:srgbClr val="23535C"/>
+                  <a:srgbClr val="11525F"/>
                 </a:solidFill>
               </a:rPr>
               <a:t>방명록</a:t>
@@ -4583,11 +4583,11 @@
             </a:avLst>
           </a:prstGeom>
           <a:solidFill>
-            <a:srgbClr val="F0F8F9"/>
+            <a:srgbClr val="EEFAFC"/>
           </a:solidFill>
           <a:ln w="15875">
             <a:solidFill>
-              <a:srgbClr val="D1EBF0"/>
+              <a:srgbClr val="D1F3FA"/>
             </a:solidFill>
           </a:ln>
         </p:spPr>
@@ -4614,7 +4614,7 @@
             <a:avLst/>
           </a:prstGeom>
           <a:solidFill>
-            <a:srgbClr val="3F95A6"/>
+            <a:srgbClr val="26AAC5"/>
           </a:solidFill>
           <a:ln>
             <a:noFill/>
@@ -4672,7 +4672,7 @@
             <a:r>
               <a:rPr sz="1800" b="1" i="0">
                 <a:solidFill>
-                  <a:srgbClr val="23535C"/>
+                  <a:srgbClr val="11525F"/>
                 </a:solidFill>
               </a:rPr>
               <a:t>사진 · 영상</a:t>
@@ -4732,7 +4732,7 @@
     <p:bg>
       <p:bgPr>
         <a:solidFill>
-          <a:srgbClr val="F0F8F9"/>
+          <a:srgbClr val="EEFAFC"/>
         </a:solidFill>
         <a:effectLst/>
       </p:bgPr>
@@ -4759,7 +4759,7 @@
             <a:avLst/>
           </a:prstGeom>
           <a:solidFill>
-            <a:srgbClr val="D1EBF0"/>
+            <a:srgbClr val="D1F3FA"/>
           </a:solidFill>
           <a:ln>
             <a:noFill/>
@@ -4788,7 +4788,7 @@
             <a:avLst/>
           </a:prstGeom>
           <a:solidFill>
-            <a:srgbClr val="3F95A6"/>
+            <a:srgbClr val="26AAC5"/>
           </a:solidFill>
           <a:ln>
             <a:noFill/>
@@ -4832,7 +4832,7 @@
             <a:r>
               <a:rPr sz="3000" b="1" i="0">
                 <a:solidFill>
-                  <a:srgbClr val="23535C"/>
+                  <a:srgbClr val="11525F"/>
                 </a:solidFill>
               </a:rPr>
               <a:t>웨딩 사진</a:t>
@@ -4857,11 +4857,11 @@
             </a:avLst>
           </a:prstGeom>
           <a:solidFill>
-            <a:srgbClr val="D1EBF0"/>
+            <a:srgbClr val="D1F3FA"/>
           </a:solidFill>
           <a:ln w="19050">
             <a:solidFill>
-              <a:srgbClr val="3F95A6"/>
+              <a:srgbClr val="26AAC5"/>
             </a:solidFill>
             <a:prstDash val="dash"/>
           </a:ln>
@@ -4880,7 +4880,7 @@
             <a:r>
               <a:rPr sz="1200" b="0" i="0">
                 <a:solidFill>
-                  <a:srgbClr val="23535C"/>
+                  <a:srgbClr val="11525F"/>
                 </a:solidFill>
               </a:rPr>
               <a:t>사진 1</a:t>
@@ -4905,11 +4905,11 @@
             </a:avLst>
           </a:prstGeom>
           <a:solidFill>
-            <a:srgbClr val="D1EBF0"/>
+            <a:srgbClr val="D1F3FA"/>
           </a:solidFill>
           <a:ln w="19050">
             <a:solidFill>
-              <a:srgbClr val="3F95A6"/>
+              <a:srgbClr val="26AAC5"/>
             </a:solidFill>
             <a:prstDash val="dash"/>
           </a:ln>
@@ -4928,7 +4928,7 @@
             <a:r>
               <a:rPr sz="1200" b="0" i="0">
                 <a:solidFill>
-                  <a:srgbClr val="23535C"/>
+                  <a:srgbClr val="11525F"/>
                 </a:solidFill>
               </a:rPr>
               <a:t>사진 2</a:t>
@@ -4953,11 +4953,11 @@
             </a:avLst>
           </a:prstGeom>
           <a:solidFill>
-            <a:srgbClr val="D1EBF0"/>
+            <a:srgbClr val="D1F3FA"/>
           </a:solidFill>
           <a:ln w="19050">
             <a:solidFill>
-              <a:srgbClr val="3F95A6"/>
+              <a:srgbClr val="26AAC5"/>
             </a:solidFill>
             <a:prstDash val="dash"/>
           </a:ln>
@@ -4976,7 +4976,7 @@
             <a:r>
               <a:rPr sz="1200" b="0" i="0">
                 <a:solidFill>
-                  <a:srgbClr val="23535C"/>
+                  <a:srgbClr val="11525F"/>
                 </a:solidFill>
               </a:rPr>
               <a:t>사진 3</a:t>
@@ -5001,11 +5001,11 @@
             </a:avLst>
           </a:prstGeom>
           <a:solidFill>
-            <a:srgbClr val="D1EBF0"/>
+            <a:srgbClr val="D1F3FA"/>
           </a:solidFill>
           <a:ln w="19050">
             <a:solidFill>
-              <a:srgbClr val="3F95A6"/>
+              <a:srgbClr val="26AAC5"/>
             </a:solidFill>
             <a:prstDash val="dash"/>
           </a:ln>
@@ -5024,7 +5024,7 @@
             <a:r>
               <a:rPr sz="1200" b="0" i="0">
                 <a:solidFill>
-                  <a:srgbClr val="23535C"/>
+                  <a:srgbClr val="11525F"/>
                 </a:solidFill>
               </a:rPr>
               <a:t>사진 4</a:t>
@@ -5049,11 +5049,11 @@
             </a:avLst>
           </a:prstGeom>
           <a:solidFill>
-            <a:srgbClr val="D1EBF0"/>
+            <a:srgbClr val="D1F3FA"/>
           </a:solidFill>
           <a:ln w="19050">
             <a:solidFill>
-              <a:srgbClr val="3F95A6"/>
+              <a:srgbClr val="26AAC5"/>
             </a:solidFill>
             <a:prstDash val="dash"/>
           </a:ln>
@@ -5072,7 +5072,7 @@
             <a:r>
               <a:rPr sz="1200" b="0" i="0">
                 <a:solidFill>
-                  <a:srgbClr val="23535C"/>
+                  <a:srgbClr val="11525F"/>
                 </a:solidFill>
               </a:rPr>
               <a:t>사진 5</a:t>
@@ -5097,11 +5097,11 @@
             </a:avLst>
           </a:prstGeom>
           <a:solidFill>
-            <a:srgbClr val="D1EBF0"/>
+            <a:srgbClr val="D1F3FA"/>
           </a:solidFill>
           <a:ln w="19050">
             <a:solidFill>
-              <a:srgbClr val="3F95A6"/>
+              <a:srgbClr val="26AAC5"/>
             </a:solidFill>
             <a:prstDash val="dash"/>
           </a:ln>
@@ -5120,7 +5120,7 @@
             <a:r>
               <a:rPr sz="1200" b="0" i="0">
                 <a:solidFill>
-                  <a:srgbClr val="23535C"/>
+                  <a:srgbClr val="11525F"/>
                 </a:solidFill>
               </a:rPr>
               <a:t>사진 6</a:t>
@@ -5200,7 +5200,7 @@
             <a:r>
               <a:rPr sz="3400" b="1" i="0">
                 <a:solidFill>
-                  <a:srgbClr val="23535C"/>
+                  <a:srgbClr val="11525F"/>
                 </a:solidFill>
               </a:rPr>
               <a:t>와 주셔서 고맙습니다</a:t>
@@ -5238,7 +5238,7 @@
             <a:r>
               <a:rPr sz="1700" b="0" i="1">
                 <a:solidFill>
-                  <a:srgbClr val="23535C"/>
+                  <a:srgbClr val="11525F"/>
                 </a:solidFill>
               </a:rPr>
               <a:t>잘 살겠습니다</a:t>
@@ -5303,34 +5303,34 @@
         <a:sysClr val="window" lastClr="FFFFFF"/>
       </a:lt1>
       <a:dk2>
-        <a:srgbClr val="23535C"/>
+        <a:srgbClr val="11525F"/>
       </a:dk2>
       <a:lt2>
-        <a:srgbClr val="F0F8F9"/>
+        <a:srgbClr val="EEFAFC"/>
       </a:lt2>
       <a:accent1>
-        <a:srgbClr val="3F95A6"/>
+        <a:srgbClr val="26AAC5"/>
       </a:accent1>
       <a:accent2>
-        <a:srgbClr val="913B58"/>
+        <a:srgbClr val="209DB6"/>
       </a:accent2>
       <a:accent3>
-        <a:srgbClr val="23535C"/>
+        <a:srgbClr val="11525F"/>
       </a:accent3>
       <a:accent4>
-        <a:srgbClr val="D1EBF0"/>
+        <a:srgbClr val="D1F3FA"/>
       </a:accent4>
       <a:accent5>
-        <a:srgbClr val="68687F"/>
+        <a:srgbClr val="23A4BE"/>
       </a:accent5>
       <a:accent6>
-        <a:srgbClr val="7B989D"/>
+        <a:srgbClr val="70979F"/>
       </a:accent6>
       <a:hlink>
-        <a:srgbClr val="3F95A6"/>
+        <a:srgbClr val="26AAC5"/>
       </a:hlink>
       <a:folHlink>
-        <a:srgbClr val="23535C"/>
+        <a:srgbClr val="11525F"/>
       </a:folHlink>
     </a:clrScheme>
     <a:fontScheme name="Office">
